--- a/Modul Minna 1/Bab 14/39. Minna 1 Tata Bahasa Bab 14 - Slide.pptx
+++ b/Modul Minna 1/Bab 14/39. Minna 1 Tata Bahasa Bab 14 - Slide.pptx
@@ -4273,7 +4273,7 @@
                 <a:ea typeface="Arial" pitchFamily="34" charset="-122"/>
                 <a:cs typeface="Arial" pitchFamily="34" charset="-120"/>
               </a:rPr>
-              <a:t>Sdr. Andi sedang menelepon.</a:t>
+              <a:t>Andi sedang menelepon.</a:t>
             </a:r>
             <a:endParaRPr lang="en-US" sz="950" dirty="0"/>
           </a:p>
